--- a/docs/lanzamiento/PRESENTACION_PARTNERS_TECNOLOGICOS.pptx
+++ b/docs/lanzamiento/PRESENTACION_PARTNERS_TECNOLOGICOS.pptx
@@ -4440,7 +4440,7 @@
             </a:pPr>
             <a:r>
               <a:rPr b="1"/>
-              <a:t>VENTAJAS PARTNER:</a:t>
+              <a:t>POR QUÉ PARTNERSHIP CODEFLOWX:</a:t>
             </a:r>
           </a:p>
           <a:p>
@@ -4457,7 +4457,7 @@
             </a:r>
             <a:r>
               <a:rPr/>
-              <a:t> +12 meses ingeniería, production-ready</a:t>
+              <a:t> Production-ready, probado en clientes reales</a:t>
             </a:r>
             <a:br/>
             <a:r>
@@ -4466,11 +4466,11 @@
             </a:r>
             <a:r>
               <a:rPr b="1"/>
-              <a:t>Diferenciación brutal:</a:t>
-            </a:r>
-            <a:r>
-              <a:rPr/>
-              <a:t> Nadie tiene 6 ISOs + GPAI compliance</a:t>
+              <a:t>Diferenciación única:</a:t>
+            </a:r>
+            <a:r>
+              <a:rPr/>
+              <a:t> Nadie más tiene 6 ISOs + 92% AI Act + GPAI</a:t>
             </a:r>
             <a:br/>
             <a:r>
@@ -4483,7 +4483,7 @@
             </a:r>
             <a:r>
               <a:rPr/>
-              <a:t> Deadlines 2025-2026 forzando adopción</a:t>
+              <a:t> Tus clientes necesitan solución YA (deadlines 2025)</a:t>
             </a:r>
             <a:br/>
             <a:r>
@@ -4492,11 +4492,11 @@
             </a:r>
             <a:r>
               <a:rPr b="1"/>
-              <a:t>Margen alto:</a:t>
-            </a:r>
-            <a:r>
-              <a:rPr/>
-              <a:t> Producto premium, clientes enterprise</a:t>
+              <a:t>Cierre proyectos:</a:t>
+            </a:r>
+            <a:r>
+              <a:rPr/>
+              <a:t> Automatización 70% → Más proyectos en menos tiempo</a:t>
             </a:r>
             <a:br/>
             <a:r>
@@ -4505,11 +4505,11 @@
             </a:r>
             <a:r>
               <a:rPr b="1"/>
-              <a:t>Revenue recurrente:</a:t>
-            </a:r>
-            <a:r>
-              <a:rPr/>
-              <a:t> Licencias anuales + servicios profesionales</a:t>
+              <a:t>Revenue adicional:</a:t>
+            </a:r>
+            <a:r>
+              <a:rPr/>
+              <a:t> Nueva línea negocio sin desarrollar producto</a:t>
             </a:r>
           </a:p>
         </p:txBody>
@@ -5166,59 +5166,59 @@
             </a:pPr>
             <a:r>
               <a:rPr b="1"/>
-              <a:t>PARA TU NEGOCIO:</a:t>
-            </a:r>
-          </a:p>
-          <a:p>
-            <a:pPr lvl="0" indent="0" marL="0">
-              <a:buNone/>
-            </a:pPr>
-            <a:r>
-              <a:rPr b="1"/>
-              <a:t>🚀 Nueva Línea Negocio:</a:t>
-            </a:r>
-            <a:r>
-              <a:rPr/>
-              <a:t> - Servicio premium compliance IA - Diferenciación vs competencia - Acceso mercado 2.5B€ (España) / 15B€ (Europa)</a:t>
-            </a:r>
-          </a:p>
-          <a:p>
-            <a:pPr lvl="0" indent="0" marL="0">
-              <a:buNone/>
-            </a:pPr>
-            <a:r>
-              <a:rPr b="1"/>
-              <a:t>💰 Revenue Recurrente:</a:t>
-            </a:r>
-            <a:r>
-              <a:rPr/>
-              <a:t> - Licencias anuales renovables - Servicios profesionales complementarios - Upselling certificaciones (ISO 42001, etc.)</a:t>
-            </a:r>
-          </a:p>
-          <a:p>
-            <a:pPr lvl="0" indent="0" marL="0">
-              <a:buNone/>
-            </a:pPr>
-            <a:r>
-              <a:rPr b="1"/>
-              <a:t>🏆 Posicionamiento Líder:</a:t>
-            </a:r>
-            <a:r>
-              <a:rPr/>
-              <a:t> - Único partner con 6 ISOs + 92% AI Act - Thought leadership EU AI Act - Referencias clientes enterprise</a:t>
-            </a:r>
-          </a:p>
-          <a:p>
-            <a:pPr lvl="0" indent="0" marL="0">
-              <a:buNone/>
-            </a:pPr>
-            <a:r>
-              <a:rPr b="1"/>
-              <a:t>🛡️ Protección Inversión:</a:t>
-            </a:r>
-            <a:r>
-              <a:rPr/>
-              <a:t> - Producto maduro (+12 meses ingeniería) - Roadmap público transparente - Soberanía europea (sin vendor lock-in USA)</a:t>
+              <a:t>PARA TU CONSULTORA:</a:t>
+            </a:r>
+          </a:p>
+          <a:p>
+            <a:pPr lvl="0" indent="0" marL="0">
+              <a:buNone/>
+            </a:pPr>
+            <a:r>
+              <a:rPr b="1"/>
+              <a:t>🚀 Nueva Línea Negocio Inmediata:</a:t>
+            </a:r>
+            <a:r>
+              <a:rPr/>
+              <a:t> - Ofrece servicio compliance IA a cartera actual - Sin desarrollar producto propio (años + millones €) - Diferenciación brutal vs competencia</a:t>
+            </a:r>
+          </a:p>
+          <a:p>
+            <a:pPr lvl="0" indent="0" marL="0">
+              <a:buNone/>
+            </a:pPr>
+            <a:r>
+              <a:rPr b="1"/>
+              <a:t>💰 Revenue Adicional:</a:t>
+            </a:r>
+            <a:r>
+              <a:rPr/>
+              <a:t> - Proyectos implementación CodeflowX - Servicios profesionales complementarios - Formación y certificación clientes - Mantenimiento y soporte ongoing</a:t>
+            </a:r>
+          </a:p>
+          <a:p>
+            <a:pPr lvl="0" indent="0" marL="0">
+              <a:buNone/>
+            </a:pPr>
+            <a:r>
+              <a:rPr b="1"/>
+              <a:t>🏆 Posicionamiento Experto:</a:t>
+            </a:r>
+            <a:r>
+              <a:rPr/>
+              <a:t> - Thought leadership EU AI Act - Partner tecnológico único (6 ISOs + 92% AI Act) - Referencias clientes enterprise</a:t>
+            </a:r>
+          </a:p>
+          <a:p>
+            <a:pPr lvl="0" indent="0" marL="0">
+              <a:buNone/>
+            </a:pPr>
+            <a:r>
+              <a:rPr b="1"/>
+              <a:t>⚡ Velocidad Cierre Proyectos:</a:t>
+            </a:r>
+            <a:r>
+              <a:rPr/>
+              <a:t> - Automatización 70% tareas compliance - Más clientes en menos tiempo - Margen superior (menos horas consultoría)</a:t>
             </a:r>
           </a:p>
         </p:txBody>
@@ -5981,7 +5981,7 @@
             </a:pPr>
             <a:r>
               <a:rPr b="1"/>
-              <a:t>EL PROBLEMA QUE RESUELVE CODEFLOWX</a:t>
+              <a:t>EL PROBLEMA DE TUS CLIENTES</a:t>
             </a:r>
           </a:p>
         </p:txBody>
@@ -6009,16 +6009,16 @@
             </a:pPr>
             <a:r>
               <a:rPr b="1"/>
-              <a:t>Empresas usando IA enfrentan:</a:t>
-            </a:r>
-          </a:p>
-          <a:p>
-            <a:pPr lvl="0" indent="0" marL="0">
-              <a:buNone/>
-            </a:pPr>
-            <a:r>
-              <a:rPr b="1"/>
-              <a:t>🚨 Compliance inminente:</a:t>
+              <a:t>Tus clientes usando IA enfrentan:</a:t>
+            </a:r>
+          </a:p>
+          <a:p>
+            <a:pPr lvl="0" indent="0" marL="0">
+              <a:buNone/>
+            </a:pPr>
+            <a:r>
+              <a:rPr b="1"/>
+              <a:t>🚨 Deadlines legales inminentes:</a:t>
             </a:r>
             <a:r>
               <a:rPr/>
@@ -6030,7 +6030,7 @@
             </a:r>
             <a:r>
               <a:rPr/>
-              <a:t> Prácticas prohibidas (Art. 5) → </a:t>
+              <a:t> Prácticas prohibidas → </a:t>
             </a:r>
             <a:r>
               <a:rPr b="1"/>
@@ -6046,7 +6046,7 @@
             </a:r>
             <a:r>
               <a:rPr/>
-              <a:t> GPAI fine-tuning/adapters (Art. 51-55) → </a:t>
+              <a:t> GPAI (fine-tuning, adapters) → </a:t>
             </a:r>
             <a:r>
               <a:rPr b="1"/>
@@ -6062,7 +6062,7 @@
             </a:r>
             <a:r>
               <a:rPr/>
-              <a:t> Sistemas alto riesgo (Art. 6-29) → </a:t>
+              <a:t> Sistemas alto riesgo → </a:t>
             </a:r>
             <a:r>
               <a:rPr b="1"/>
@@ -6075,7 +6075,7 @@
             </a:pPr>
             <a:r>
               <a:rPr b="1"/>
-              <a:t>Multas devastadoras:</a:t>
+              <a:t>Multas que pueden quebrar empresas:</a:t>
             </a:r>
             <a:r>
               <a:rPr/>
@@ -6095,20 +6095,20 @@
             </a:r>
             <a:r>
               <a:rPr/>
-              <a:t> (lo mayor) - Sin compliance → No pueden operar en UE</a:t>
-            </a:r>
-          </a:p>
-          <a:p>
-            <a:pPr lvl="0" indent="0" marL="0">
-              <a:buNone/>
-            </a:pPr>
-            <a:r>
-              <a:rPr b="1"/>
-              <a:t>Complejidad técnica:</a:t>
-            </a:r>
-            <a:r>
-              <a:rPr/>
-              <a:t> - 85 artículos + 13 anexos EU AI Act - 6 ISOs internacionales - GDPR + normativas sectoriales - Evaluación 100+ métricas por modelo - Documentación técnica exhaustiva</a:t>
+              <a:t> - Sin compliance → Prohibido operar en UE</a:t>
+            </a:r>
+          </a:p>
+          <a:p>
+            <a:pPr lvl="0" indent="0" marL="0">
+              <a:buNone/>
+            </a:pPr>
+            <a:r>
+              <a:rPr b="1"/>
+              <a:t>Complejidad inabordable internamente:</a:t>
+            </a:r>
+            <a:r>
+              <a:rPr/>
+              <a:t> - 85 artículos + 13 anexos AI Act - 6 ISOs para certificación - Clasificación 31 subcategorías Anexo III - Evaluación 100+ métricas por modelo - Documentación técnica exhaustiva (Anexo IV)</a:t>
             </a:r>
           </a:p>
         </p:txBody>
@@ -6158,33 +6158,88 @@
             </a:pPr>
             <a:r>
               <a:rPr b="1"/>
-              <a:t>Mercado objetivo:</a:t>
-            </a:r>
-          </a:p>
-          <a:p>
-            <a:pPr lvl="0" indent="0" marL="0">
-              <a:buNone/>
-            </a:pPr>
-            <a:r>
-              <a:rPr b="1"/>
-              <a:t>500.000+ empresas UE</a:t>
-            </a:r>
-            <a:r>
-              <a:rPr/>
-              <a:t> usando IA en producción: - Banca, seguros, salud (sectores regulados) - RRHH tech (filtrado CVs, evaluación desempeño) - SaaS companies (chatbots, RAG, agentes) - Marketing agencies (generación contenido IA) - Consultoras tech (fine-tuning modelos para clientes)</a:t>
-            </a:r>
-          </a:p>
-          <a:p>
-            <a:pPr lvl="0" indent="0" marL="0">
-              <a:buNone/>
-            </a:pPr>
-            <a:r>
-              <a:rPr b="1"/>
-              <a:t>TAM estimado:</a:t>
-            </a:r>
-            <a:r>
-              <a:rPr/>
-              <a:t> 2.5B€ en España, 15B€ en Europa (2025-2027)</a:t>
+              <a:t>Oportunidad para tu consultora:</a:t>
+            </a:r>
+          </a:p>
+          <a:p>
+            <a:pPr lvl="0" indent="0" marL="0">
+              <a:buNone/>
+            </a:pPr>
+            <a:r>
+              <a:rPr b="1"/>
+              <a:t>Nueva línea de negocio compliance IA</a:t>
+            </a:r>
+          </a:p>
+          <a:p>
+            <a:pPr lvl="0" indent="0" marL="0">
+              <a:buNone/>
+            </a:pPr>
+            <a:r>
+              <a:rPr/>
+              <a:t>Tus clientes actuales te preguntarán: - </a:t>
+            </a:r>
+            <a:r>
+              <a:rPr i="1"/>
+              <a:t>“¿Cumplimos con AI Act?”</a:t>
+            </a:r>
+            <a:r>
+              <a:rPr/>
+              <a:t> - </a:t>
+            </a:r>
+            <a:r>
+              <a:rPr i="1"/>
+              <a:t>“¿Cómo clasificamos nuestros sistemas?”</a:t>
+            </a:r>
+            <a:r>
+              <a:rPr/>
+              <a:t> - </a:t>
+            </a:r>
+            <a:r>
+              <a:rPr i="1"/>
+              <a:t>“¿Necesitamos FRIA?”</a:t>
+            </a:r>
+            <a:r>
+              <a:rPr/>
+              <a:t> - </a:t>
+            </a:r>
+            <a:r>
+              <a:rPr i="1"/>
+              <a:t>“¿Qué hacemos con fine-tuning?”</a:t>
+            </a:r>
+          </a:p>
+          <a:p>
+            <a:pPr lvl="0" indent="0" marL="0">
+              <a:buNone/>
+            </a:pPr>
+            <a:r>
+              <a:rPr b="1"/>
+              <a:t>Sin CodeflowX:</a:t>
+            </a:r>
+            <a:r>
+              <a:rPr/>
+              <a:t> Proyectos 6-12 meses manuales</a:t>
+            </a:r>
+            <a:br/>
+            <a:r>
+              <a:rPr b="1"/>
+              <a:t>Con CodeflowX:</a:t>
+            </a:r>
+            <a:r>
+              <a:rPr/>
+              <a:t> Proyectos 2-4 semanas automatizados</a:t>
+            </a:r>
+          </a:p>
+          <a:p>
+            <a:pPr lvl="0" indent="0" marL="0">
+              <a:buNone/>
+            </a:pPr>
+            <a:r>
+              <a:rPr b="1"/>
+              <a:t>Tu valor:</a:t>
+            </a:r>
+            <a:r>
+              <a:rPr/>
+              <a:t> Expertise + Plataforma líder = Servicio premium diferenciado</a:t>
             </a:r>
           </a:p>
         </p:txBody>
